--- a/public/downloads/US-8252-Compile-and-Produce-Reports-Training.pptx
+++ b/public/downloads/US-8252-Compile-and-Produce-Reports-Training.pptx
@@ -5435,9 +5435,9 @@
             <a:prstDash val="solid"/>
           </a:ln>
           <a:effectLst>
-            <a:outerShdw sx="100000" sy="100000" kx="0" ky="0" algn="bl" rotWithShape="0" blurRad="2.368233676425688e+140" dist="6.766381932644821e+139" dir="2.5786061996226343e+164">
+            <a:outerShdw sx="100000" sy="100000" kx="0" ky="0" algn="bl" rotWithShape="0" blurRad="88900" dist="25400" dir="5400000">
               <a:srgbClr val="9AB4CC">
-                <a:alpha val="3e+169"/>
+                <a:alpha val="30000"/>
               </a:srgbClr>
             </a:outerShdw>
           </a:effectLst>
@@ -5597,9 +5597,9 @@
             <a:prstDash val="solid"/>
           </a:ln>
           <a:effectLst>
-            <a:outerShdw sx="100000" sy="100000" kx="0" ky="0" algn="bl" rotWithShape="0" blurRad="3.0076567690606238e+144" dist="8.593305054458923e+143" dir="1.5471637197735807e+169">
+            <a:outerShdw sx="100000" sy="100000" kx="0" ky="0" algn="bl" rotWithShape="0" blurRad="88900" dist="25400" dir="5400000">
               <a:srgbClr val="9AB4CC">
-                <a:alpha val="3e+174"/>
+                <a:alpha val="30000"/>
               </a:srgbClr>
             </a:outerShdw>
           </a:effectLst>
@@ -5739,9 +5739,9 @@
             <a:prstDash val="solid"/>
           </a:ln>
           <a:effectLst>
-            <a:outerShdw sx="100000" sy="100000" kx="0" ky="0" algn="bl" rotWithShape="0" blurRad="3.819724096706992e+148" dist="1.0913497419162833e+148" dir="9.282982318641485e+173">
+            <a:outerShdw sx="100000" sy="100000" kx="0" ky="0" algn="bl" rotWithShape="0" blurRad="88900" dist="25400" dir="5400000">
               <a:srgbClr val="9AB4CC">
-                <a:alpha val="3e+179"/>
+                <a:alpha val="30000"/>
               </a:srgbClr>
             </a:outerShdw>
           </a:effectLst>
@@ -6346,9 +6346,9 @@
             <a:prstDash val="solid"/>
           </a:ln>
           <a:effectLst>
-            <a:outerShdw sx="100000" sy="100000" kx="0" ky="0" algn="bl" rotWithShape="0" blurRad="4.85104960281788e+152" dist="1.38601417223368e+152" dir="5.569789391184891e+178">
+            <a:outerShdw sx="100000" sy="100000" kx="0" ky="0" algn="bl" rotWithShape="0" blurRad="88900" dist="25400" dir="5400000">
               <a:srgbClr val="9AB4CC">
-                <a:alpha val="3e+184"/>
+                <a:alpha val="30000"/>
               </a:srgbClr>
             </a:outerShdw>
           </a:effectLst>
@@ -6488,9 +6488,9 @@
             <a:prstDash val="solid"/>
           </a:ln>
           <a:effectLst>
-            <a:outerShdw sx="100000" sy="100000" kx="0" ky="0" algn="bl" rotWithShape="0" blurRad="6.160832995578707e+156" dist="1.7602379987367734e+156" dir="3.3418736347109347e+183">
+            <a:outerShdw sx="100000" sy="100000" kx="0" ky="0" algn="bl" rotWithShape="0" blurRad="88900" dist="25400" dir="5400000">
               <a:srgbClr val="9AB4CC">
-                <a:alpha val="3e+189"/>
+                <a:alpha val="30000"/>
               </a:srgbClr>
             </a:outerShdw>
           </a:effectLst>
@@ -6630,9 +6630,9 @@
             <a:prstDash val="solid"/>
           </a:ln>
           <a:effectLst>
-            <a:outerShdw sx="100000" sy="100000" kx="0" ky="0" algn="bl" rotWithShape="0" blurRad="7.824257904384958e+160" dist="2.235502258395702e+160" dir="2.0051241808265608e+188">
+            <a:outerShdw sx="100000" sy="100000" kx="0" ky="0" algn="bl" rotWithShape="0" blurRad="88900" dist="25400" dir="5400000">
               <a:srgbClr val="9AB4CC">
-                <a:alpha val="2.9999999999999997e+194"/>
+                <a:alpha val="30000"/>
               </a:srgbClr>
             </a:outerShdw>
           </a:effectLst>
@@ -6772,9 +6772,9 @@
             <a:prstDash val="solid"/>
           </a:ln>
           <a:effectLst>
-            <a:outerShdw sx="100000" sy="100000" kx="0" ky="0" algn="bl" rotWithShape="0" blurRad="9.936807538568897e+164" dist="2.8390878681625417e+164" dir="1.2030745084959364e+193">
+            <a:outerShdw sx="100000" sy="100000" kx="0" ky="0" algn="bl" rotWithShape="0" blurRad="88900" dist="25400" dir="5400000">
               <a:srgbClr val="9AB4CC">
-                <a:alpha val="2.9999999999999997e+199"/>
+                <a:alpha val="30000"/>
               </a:srgbClr>
             </a:outerShdw>
           </a:effectLst>
@@ -7122,9 +7122,9 @@
             <a:prstDash val="solid"/>
           </a:ln>
           <a:effectLst>
-            <a:outerShdw sx="100000" sy="100000" kx="0" ky="0" algn="bl" rotWithShape="0" blurRad="1.26197455739825e+169" dist="3.605641592566428e+168" dir="7.218447050975619e+197">
+            <a:outerShdw sx="100000" sy="100000" kx="0" ky="0" algn="bl" rotWithShape="0" blurRad="88900" dist="25400" dir="5400000">
               <a:srgbClr val="9AB4CC">
-                <a:alpha val="3e+204"/>
+                <a:alpha val="30000"/>
               </a:srgbClr>
             </a:outerShdw>
           </a:effectLst>
@@ -7284,9 +7284,9 @@
             <a:prstDash val="solid"/>
           </a:ln>
           <a:effectLst>
-            <a:outerShdw sx="100000" sy="100000" kx="0" ky="0" algn="bl" rotWithShape="0" blurRad="1.6027076878957775e+173" dist="4.579164822559364e+172" dir="4.3310682305853715e+202">
+            <a:outerShdw sx="100000" sy="100000" kx="0" ky="0" algn="bl" rotWithShape="0" blurRad="88900" dist="25400" dir="5400000">
               <a:srgbClr val="9AB4CC">
-                <a:alpha val="3e+209"/>
+                <a:alpha val="30000"/>
               </a:srgbClr>
             </a:outerShdw>
           </a:effectLst>
@@ -7426,9 +7426,9 @@
             <a:prstDash val="solid"/>
           </a:ln>
           <a:effectLst>
-            <a:outerShdw sx="100000" sy="100000" kx="0" ky="0" algn="bl" rotWithShape="0" blurRad="2.0354387636276376e+177" dist="5.815539324650392e+176" dir="2.598640938351223e+207">
+            <a:outerShdw sx="100000" sy="100000" kx="0" ky="0" algn="bl" rotWithShape="0" blurRad="88900" dist="25400" dir="5400000">
               <a:srgbClr val="9AB4CC">
-                <a:alpha val="2.9999999999999996e+214"/>
+                <a:alpha val="30000"/>
               </a:srgbClr>
             </a:outerShdw>
           </a:effectLst>
@@ -8033,9 +8033,9 @@
             <a:prstDash val="solid"/>
           </a:ln>
           <a:effectLst>
-            <a:outerShdw sx="100000" sy="100000" kx="0" ky="0" algn="bl" rotWithShape="0" blurRad="2.5850072298071e+181" dist="7.385734942305998e+180" dir="1.5591845630107338e+212">
+            <a:outerShdw sx="100000" sy="100000" kx="0" ky="0" algn="bl" rotWithShape="0" blurRad="88900" dist="25400" dir="5400000">
               <a:srgbClr val="9AB4CC">
-                <a:alpha val="3e+219"/>
+                <a:alpha val="30000"/>
               </a:srgbClr>
             </a:outerShdw>
           </a:effectLst>
@@ -8175,9 +8175,9 @@
             <a:prstDash val="solid"/>
           </a:ln>
           <a:effectLst>
-            <a:outerShdw sx="100000" sy="100000" kx="0" ky="0" algn="bl" rotWithShape="0" blurRad="3.282959181855017e+185" dist="9.379883376728618e+184" dir="9.355107378064403e+216">
+            <a:outerShdw sx="100000" sy="100000" kx="0" ky="0" algn="bl" rotWithShape="0" blurRad="88900" dist="25400" dir="5400000">
               <a:srgbClr val="9AB4CC">
-                <a:alpha val="2.9999999999999997e+224"/>
+                <a:alpha val="30000"/>
               </a:srgbClr>
             </a:outerShdw>
           </a:effectLst>
@@ -8545,9 +8545,9 @@
             <a:prstDash val="solid"/>
           </a:ln>
           <a:effectLst>
-            <a:outerShdw sx="100000" sy="100000" kx="0" ky="0" algn="bl" rotWithShape="0" blurRad="4.1693581609558713e+189" dist="1.1912451888445345e+189" dir="5.613064426838642e+221">
+            <a:outerShdw sx="100000" sy="100000" kx="0" ky="0" algn="bl" rotWithShape="0" blurRad="88900" dist="25400" dir="5400000">
               <a:srgbClr val="9AB4CC">
-                <a:alpha val="2.9999999999999994e+229"/>
+                <a:alpha val="30000"/>
               </a:srgbClr>
             </a:outerShdw>
           </a:effectLst>
@@ -8707,9 +8707,9 @@
             <a:prstDash val="solid"/>
           </a:ln>
           <a:effectLst>
-            <a:outerShdw sx="100000" sy="100000" kx="0" ky="0" algn="bl" rotWithShape="0" blurRad="5.295084864413956e+193" dist="1.5128813898325588e+193" dir="3.367838656103185e+226">
+            <a:outerShdw sx="100000" sy="100000" kx="0" ky="0" algn="bl" rotWithShape="0" blurRad="88900" dist="25400" dir="5400000">
               <a:srgbClr val="9AB4CC">
-                <a:alpha val="2.9999999999999995e+234"/>
+                <a:alpha val="30000"/>
               </a:srgbClr>
             </a:outerShdw>
           </a:effectLst>
@@ -8849,9 +8849,9 @@
             <a:prstDash val="solid"/>
           </a:ln>
           <a:effectLst>
-            <a:outerShdw sx="100000" sy="100000" kx="0" ky="0" algn="bl" rotWithShape="0" blurRad="6.724757777805725e+197" dist="1.9213593650873497e+197" dir="2.020703193661911e+231">
+            <a:outerShdw sx="100000" sy="100000" kx="0" ky="0" algn="bl" rotWithShape="0" blurRad="88900" dist="25400" dir="5400000">
               <a:srgbClr val="9AB4CC">
-                <a:alpha val="2.9999999999999994e+239"/>
+                <a:alpha val="30000"/>
               </a:srgbClr>
             </a:outerShdw>
           </a:effectLst>
@@ -11340,9 +11340,9 @@
             <a:prstDash val="solid"/>
           </a:ln>
           <a:effectLst>
-            <a:outerShdw sx="100000" sy="100000" kx="0" ky="0" algn="bl" rotWithShape="0" blurRad="8.54044237781327e+201" dist="2.440126393660934e+201" dir="1.2124219161971466e+236">
+            <a:outerShdw sx="100000" sy="100000" kx="0" ky="0" algn="bl" rotWithShape="0" blurRad="88900" dist="25400" dir="5400000">
               <a:srgbClr val="9AB4CC">
-                <a:alpha val="2.999999999999999e+244"/>
+                <a:alpha val="30000"/>
               </a:srgbClr>
             </a:outerShdw>
           </a:effectLst>
@@ -11502,9 +11502,9 @@
             <a:prstDash val="solid"/>
           </a:ln>
           <a:effectLst>
-            <a:outerShdw sx="100000" sy="100000" kx="0" ky="0" algn="bl" rotWithShape="0" blurRad="1.0846361819822852e+206" dist="3.0989605199493864e+205" dir="7.27453149718288e+240">
+            <a:outerShdw sx="100000" sy="100000" kx="0" ky="0" algn="bl" rotWithShape="0" blurRad="88900" dist="25400" dir="5400000">
               <a:srgbClr val="9AB4CC">
-                <a:alpha val="2.999999999999999e+249"/>
+                <a:alpha val="30000"/>
               </a:srgbClr>
             </a:outerShdw>
           </a:effectLst>
@@ -11644,9 +11644,9 @@
             <a:prstDash val="solid"/>
           </a:ln>
           <a:effectLst>
-            <a:outerShdw sx="100000" sy="100000" kx="0" ky="0" algn="bl" rotWithShape="0" blurRad="1.3774879511175023e+210" dist="3.9356798603357206e+209" dir="4.364718898309728e+245">
+            <a:outerShdw sx="100000" sy="100000" kx="0" ky="0" algn="bl" rotWithShape="0" blurRad="88900" dist="25400" dir="5400000">
               <a:srgbClr val="9AB4CC">
-                <a:alpha val="2.999999999999999e+254"/>
+                <a:alpha val="30000"/>
               </a:srgbClr>
             </a:outerShdw>
           </a:effectLst>
@@ -13179,9 +13179,9 @@
             <a:prstDash val="solid"/>
           </a:ln>
           <a:effectLst>
-            <a:outerShdw sx="100000" sy="100000" kx="0" ky="0" algn="bl" rotWithShape="0" blurRad="1.7494096979192279e+214" dist="4.9983134226263654e+213" dir="2.6188313389858368e+250">
+            <a:outerShdw sx="100000" sy="100000" kx="0" ky="0" algn="bl" rotWithShape="0" blurRad="88900" dist="25400" dir="5400000">
               <a:srgbClr val="9AB4CC">
-                <a:alpha val="2.999999999999999e+259"/>
+                <a:alpha val="30000"/>
               </a:srgbClr>
             </a:outerShdw>
           </a:effectLst>
@@ -13341,9 +13341,9 @@
             <a:prstDash val="solid"/>
           </a:ln>
           <a:effectLst>
-            <a:outerShdw sx="100000" sy="100000" kx="0" ky="0" algn="bl" rotWithShape="0" blurRad="2.2217503163574194e+218" dist="6.347858046735484e+217" dir="1.571298803391502e+255">
+            <a:outerShdw sx="100000" sy="100000" kx="0" ky="0" algn="bl" rotWithShape="0" blurRad="88900" dist="25400" dir="5400000">
               <a:srgbClr val="9AB4CC">
-                <a:alpha val="2.999999999999999e+264"/>
+                <a:alpha val="30000"/>
               </a:srgbClr>
             </a:outerShdw>
           </a:effectLst>
@@ -13483,9 +13483,9 @@
             <a:prstDash val="solid"/>
           </a:ln>
           <a:effectLst>
-            <a:outerShdw sx="100000" sy="100000" kx="0" ky="0" algn="bl" rotWithShape="0" blurRad="2.8216229017739227e+222" dist="8.061779719354066e+221" dir="9.427792820349012e+259">
+            <a:outerShdw sx="100000" sy="100000" kx="0" ky="0" algn="bl" rotWithShape="0" blurRad="88900" dist="25400" dir="5400000">
               <a:srgbClr val="9AB4CC">
-                <a:alpha val="2.999999999999999e+269"/>
+                <a:alpha val="30000"/>
               </a:srgbClr>
             </a:outerShdw>
           </a:effectLst>
@@ -14190,9 +14190,9 @@
             <a:prstDash val="solid"/>
           </a:ln>
           <a:effectLst>
-            <a:outerShdw sx="100000" sy="100000" kx="0" ky="0" algn="bl" rotWithShape="0" blurRad="1129030000" dist="322580000" dir="324000000000">
+            <a:outerShdw sx="100000" sy="100000" kx="0" ky="0" algn="bl" rotWithShape="0" blurRad="88900" dist="25400" dir="5400000">
               <a:srgbClr val="9AB4CC">
-                <a:alpha val="3000000000"/>
+                <a:alpha val="30000"/>
               </a:srgbClr>
             </a:outerShdw>
           </a:effectLst>
@@ -14332,9 +14332,9 @@
             <a:prstDash val="solid"/>
           </a:ln>
           <a:effectLst>
-            <a:outerShdw sx="100000" sy="100000" kx="0" ky="0" algn="bl" rotWithShape="0" blurRad="14338681000000" dist="4096766000000" dir="19440000000000000">
+            <a:outerShdw sx="100000" sy="100000" kx="0" ky="0" algn="bl" rotWithShape="0" blurRad="88900" dist="25400" dir="5400000">
               <a:srgbClr val="9AB4CC">
-                <a:alpha val="300000000000000"/>
+                <a:alpha val="30000"/>
               </a:srgbClr>
             </a:outerShdw>
           </a:effectLst>
@@ -14474,9 +14474,9 @@
             <a:prstDash val="solid"/>
           </a:ln>
           <a:effectLst>
-            <a:outerShdw sx="100000" sy="100000" kx="0" ky="0" algn="bl" rotWithShape="0" blurRad="182101248700000000" dist="52028928200000000" dir="1.1664e+21">
+            <a:outerShdw sx="100000" sy="100000" kx="0" ky="0" algn="bl" rotWithShape="0" blurRad="88900" dist="25400" dir="5400000">
               <a:srgbClr val="9AB4CC">
-                <a:alpha val="30000000000000000000"/>
+                <a:alpha val="30000"/>
               </a:srgbClr>
             </a:outerShdw>
           </a:effectLst>
@@ -14616,9 +14616,9 @@
             <a:prstDash val="solid"/>
           </a:ln>
           <a:effectLst>
-            <a:outerShdw sx="100000" sy="100000" kx="0" ky="0" algn="bl" rotWithShape="0" blurRad="2.31268585849e+21" dist="660767388140000000000" dir="6.9984e+25">
+            <a:outerShdw sx="100000" sy="100000" kx="0" ky="0" algn="bl" rotWithShape="0" blurRad="88900" dist="25400" dir="5400000">
               <a:srgbClr val="9AB4CC">
-                <a:alpha val="3e+24"/>
+                <a:alpha val="30000"/>
               </a:srgbClr>
             </a:outerShdw>
           </a:effectLst>
@@ -14758,9 +14758,9 @@
             <a:prstDash val="solid"/>
           </a:ln>
           <a:effectLst>
-            <a:outerShdw sx="100000" sy="100000" kx="0" ky="0" algn="bl" rotWithShape="0" blurRad="2.9371110402823e+25" dist="8.391745829378e+24" dir="4.19904e+30">
+            <a:outerShdw sx="100000" sy="100000" kx="0" ky="0" algn="bl" rotWithShape="0" blurRad="88900" dist="25400" dir="5400000">
               <a:srgbClr val="9AB4CC">
-                <a:alpha val="3e+29"/>
+                <a:alpha val="30000"/>
               </a:srgbClr>
             </a:outerShdw>
           </a:effectLst>
@@ -14900,9 +14900,9 @@
             <a:prstDash val="solid"/>
           </a:ln>
           <a:effectLst>
-            <a:outerShdw sx="100000" sy="100000" kx="0" ky="0" algn="bl" rotWithShape="0" blurRad="3.730131021158521e+29" dist="1.0657517203310059e+29" dir="2.519424e+35">
+            <a:outerShdw sx="100000" sy="100000" kx="0" ky="0" algn="bl" rotWithShape="0" blurRad="88900" dist="25400" dir="5400000">
               <a:srgbClr val="9AB4CC">
-                <a:alpha val="2.9999999999999997e+34"/>
+                <a:alpha val="30000"/>
               </a:srgbClr>
             </a:outerShdw>
           </a:effectLst>
@@ -15042,9 +15042,9 @@
             <a:prstDash val="solid"/>
           </a:ln>
           <a:effectLst>
-            <a:outerShdw sx="100000" sy="100000" kx="0" ky="0" algn="bl" rotWithShape="0" blurRad="4.737266396871321e+33" dist="1.3535046848203775e+33" dir="1.5116544e+40">
+            <a:outerShdw sx="100000" sy="100000" kx="0" ky="0" algn="bl" rotWithShape="0" blurRad="88900" dist="25400" dir="5400000">
               <a:srgbClr val="9AB4CC">
-                <a:alpha val="3e+39"/>
+                <a:alpha val="30000"/>
               </a:srgbClr>
             </a:outerShdw>
           </a:effectLst>
@@ -15649,9 +15649,9 @@
             <a:prstDash val="solid"/>
           </a:ln>
           <a:effectLst>
-            <a:outerShdw sx="100000" sy="100000" kx="0" ky="0" algn="bl" rotWithShape="0" blurRad="3.5834610852528816e+226" dist="1.0238460243579663e+226" dir="5.656675692209407e+264">
+            <a:outerShdw sx="100000" sy="100000" kx="0" ky="0" algn="bl" rotWithShape="0" blurRad="88900" dist="25400" dir="5400000">
               <a:srgbClr val="9AB4CC">
-                <a:alpha val="2.9999999999999988e+274"/>
+                <a:alpha val="30000"/>
               </a:srgbClr>
             </a:outerShdw>
           </a:effectLst>
@@ -15796,9 +15796,9 @@
             <a:prstDash val="solid"/>
           </a:ln>
           <a:effectLst>
-            <a:outerShdw sx="100000" sy="100000" kx="0" ky="0" algn="bl" rotWithShape="0" blurRad="4.550995578271159e+230" dist="1.3002844509346172e+230" dir="3.3940054153256444e+269">
+            <a:outerShdw sx="100000" sy="100000" kx="0" ky="0" algn="bl" rotWithShape="0" blurRad="88900" dist="25400" dir="5400000">
               <a:srgbClr val="9AB4CC">
-                <a:alpha val="2.999999999999999e+279"/>
+                <a:alpha val="30000"/>
               </a:srgbClr>
             </a:outerShdw>
           </a:effectLst>
@@ -15943,9 +15943,9 @@
             <a:prstDash val="solid"/>
           </a:ln>
           <a:effectLst>
-            <a:outerShdw sx="100000" sy="100000" kx="0" ky="0" algn="bl" rotWithShape="0" blurRad="5.7797643844043726e+234" dist="1.6513612526869638e+234" dir="2.0364032491953868e+274">
+            <a:outerShdw sx="100000" sy="100000" kx="0" ky="0" algn="bl" rotWithShape="0" blurRad="88900" dist="25400" dir="5400000">
               <a:srgbClr val="9AB4CC">
-                <a:alpha val="2.999999999999999e+284"/>
+                <a:alpha val="30000"/>
               </a:srgbClr>
             </a:outerShdw>
           </a:effectLst>
@@ -16090,9 +16090,9 @@
             <a:prstDash val="solid"/>
           </a:ln>
           <a:effectLst>
-            <a:outerShdw sx="100000" sy="100000" kx="0" ky="0" algn="bl" rotWithShape="0" blurRad="7.340300768193554e+238" dist="2.097228790912444e+238" dir="1.221841949517232e+279">
+            <a:outerShdw sx="100000" sy="100000" kx="0" ky="0" algn="bl" rotWithShape="0" blurRad="88900" dist="25400" dir="5400000">
               <a:srgbClr val="9AB4CC">
-                <a:alpha val="2.999999999999999e+289"/>
+                <a:alpha val="30000"/>
               </a:srgbClr>
             </a:outerShdw>
           </a:effectLst>
@@ -16237,9 +16237,9 @@
             <a:prstDash val="solid"/>
           </a:ln>
           <a:effectLst>
-            <a:outerShdw sx="100000" sy="100000" kx="0" ky="0" algn="bl" rotWithShape="0" blurRad="9.322181975605814e+242" dist="2.663480564458804e+242" dir="7.331051697103393e+283">
+            <a:outerShdw sx="100000" sy="100000" kx="0" ky="0" algn="bl" rotWithShape="0" blurRad="88900" dist="25400" dir="5400000">
               <a:srgbClr val="9AB4CC">
-                <a:alpha val="2.999999999999999e+294"/>
+                <a:alpha val="30000"/>
               </a:srgbClr>
             </a:outerShdw>
           </a:effectLst>
@@ -16384,9 +16384,9 @@
             <a:prstDash val="solid"/>
           </a:ln>
           <a:effectLst>
-            <a:outerShdw sx="100000" sy="100000" kx="0" ky="0" algn="bl" rotWithShape="0" blurRad="1.1839171109019383e+247" dist="3.3826203168626813e+246" dir="4.3986310182620354e+288">
+            <a:outerShdw sx="100000" sy="100000" kx="0" ky="0" algn="bl" rotWithShape="0" blurRad="88900" dist="25400" dir="5400000">
               <a:srgbClr val="9AB4CC">
-                <a:alpha val="2.999999999999999e+299"/>
+                <a:alpha val="30000"/>
               </a:srgbClr>
             </a:outerShdw>
           </a:effectLst>
@@ -16739,9 +16739,9 @@
             <a:prstDash val="solid"/>
           </a:ln>
           <a:effectLst>
-            <a:outerShdw sx="100000" sy="100000" kx="0" ky="0" algn="bl" rotWithShape="0" blurRad="1.5035747308454617e+251" dist="4.295927802415605e+250" dir="2.6391786109572213e+293">
+            <a:outerShdw sx="100000" sy="100000" kx="0" ky="0" algn="bl" rotWithShape="0" blurRad="88900" dist="25400" dir="5400000">
               <a:srgbClr val="9AB4CC">
-                <a:alpha val="2.999999999999999e+304"/>
+                <a:alpha val="30000"/>
               </a:srgbClr>
             </a:outerShdw>
           </a:effectLst>
@@ -16901,9 +16901,9 @@
             <a:prstDash val="solid"/>
           </a:ln>
           <a:effectLst>
-            <a:outerShdw sx="100000" sy="100000" kx="0" ky="0" algn="bl" rotWithShape="0" blurRad="1.9095399081737364e+255" dist="5.455828309067819e+254" dir="1.5835071665743328e+298">
+            <a:outerShdw sx="100000" sy="100000" kx="0" ky="0" algn="bl" rotWithShape="0" blurRad="88900" dist="25400" dir="5400000">
               <a:srgbClr val="9AB4CC">
-                <a:alpha val="Infinity"/>
+                <a:alpha val="30000"/>
               </a:srgbClr>
             </a:outerShdw>
           </a:effectLst>
@@ -17043,9 +17043,9 @@
             <a:prstDash val="solid"/>
           </a:ln>
           <a:effectLst>
-            <a:outerShdw sx="100000" sy="100000" kx="0" ky="0" algn="bl" rotWithShape="0" blurRad="2.425115683380645e+259" dist="6.928901952516129e+258" dir="9.501042999445996e+302">
+            <a:outerShdw sx="100000" sy="100000" kx="0" ky="0" algn="bl" rotWithShape="0" blurRad="88900" dist="25400" dir="5400000">
               <a:srgbClr val="9AB4CC">
-                <a:alpha val="Infinity"/>
+                <a:alpha val="30000"/>
               </a:srgbClr>
             </a:outerShdw>
           </a:effectLst>
@@ -18986,9 +18986,9 @@
             <a:prstDash val="solid"/>
           </a:ln>
           <a:effectLst>
-            <a:outerShdw sx="100000" sy="100000" kx="0" ky="0" algn="bl" rotWithShape="0" blurRad="3.079896917893419e+263" dist="8.799705479695485e+262" dir="5.700625799667598e+307">
+            <a:outerShdw sx="100000" sy="100000" kx="0" ky="0" algn="bl" rotWithShape="0" blurRad="88900" dist="25400" dir="5400000">
               <a:srgbClr val="9AB4CC">
-                <a:alpha val="Infinity"/>
+                <a:alpha val="30000"/>
               </a:srgbClr>
             </a:outerShdw>
           </a:effectLst>
@@ -19148,9 +19148,9 @@
             <a:prstDash val="solid"/>
           </a:ln>
           <a:effectLst>
-            <a:outerShdw sx="100000" sy="100000" kx="0" ky="0" algn="bl" rotWithShape="0" blurRad="3.9114690857246423e+267" dist="1.1175625959213265e+267" dir="Infinity">
+            <a:outerShdw sx="100000" sy="100000" kx="0" ky="0" algn="bl" rotWithShape="0" blurRad="88900" dist="25400" dir="5400000">
               <a:srgbClr val="9AB4CC">
-                <a:alpha val="Infinity"/>
+                <a:alpha val="30000"/>
               </a:srgbClr>
             </a:outerShdw>
           </a:effectLst>
@@ -19290,9 +19290,9 @@
             <a:prstDash val="solid"/>
           </a:ln>
           <a:effectLst>
-            <a:outerShdw sx="100000" sy="100000" kx="0" ky="0" algn="bl" rotWithShape="0" blurRad="4.9675657388702955e+271" dist="1.4193044968200846e+271" dir="Infinity">
+            <a:outerShdw sx="100000" sy="100000" kx="0" ky="0" algn="bl" rotWithShape="0" blurRad="88900" dist="25400" dir="5400000">
               <a:srgbClr val="9AB4CC">
-                <a:alpha val="Infinity"/>
+                <a:alpha val="30000"/>
               </a:srgbClr>
             </a:outerShdw>
           </a:effectLst>
@@ -20829,9 +20829,9 @@
             <a:prstDash val="solid"/>
           </a:ln>
           <a:effectLst>
-            <a:outerShdw sx="100000" sy="100000" kx="0" ky="0" algn="bl" rotWithShape="0" blurRad="6.308808488365275e+275" dist="1.8025167109615074e+275" dir="Infinity">
+            <a:outerShdw sx="100000" sy="100000" kx="0" ky="0" algn="bl" rotWithShape="0" blurRad="88900" dist="25400" dir="5400000">
               <a:srgbClr val="9AB4CC">
-                <a:alpha val="Infinity"/>
+                <a:alpha val="30000"/>
               </a:srgbClr>
             </a:outerShdw>
           </a:effectLst>
@@ -20991,9 +20991,9 @@
             <a:prstDash val="solid"/>
           </a:ln>
           <a:effectLst>
-            <a:outerShdw sx="100000" sy="100000" kx="0" ky="0" algn="bl" rotWithShape="0" blurRad="8.012186780223899e+279" dist="2.2891962229211143e+279" dir="Infinity">
+            <a:outerShdw sx="100000" sy="100000" kx="0" ky="0" algn="bl" rotWithShape="0" blurRad="88900" dist="25400" dir="5400000">
               <a:srgbClr val="9AB4CC">
-                <a:alpha val="Infinity"/>
+                <a:alpha val="30000"/>
               </a:srgbClr>
             </a:outerShdw>
           </a:effectLst>
@@ -21133,9 +21133,9 @@
             <a:prstDash val="solid"/>
           </a:ln>
           <a:effectLst>
-            <a:outerShdw sx="100000" sy="100000" kx="0" ky="0" algn="bl" rotWithShape="0" blurRad="1.0175477210884352e+284" dist="2.9072792031098153e+283" dir="Infinity">
+            <a:outerShdw sx="100000" sy="100000" kx="0" ky="0" algn="bl" rotWithShape="0" blurRad="88900" dist="25400" dir="5400000">
               <a:srgbClr val="9AB4CC">
-                <a:alpha val="Infinity"/>
+                <a:alpha val="30000"/>
               </a:srgbClr>
             </a:outerShdw>
           </a:effectLst>
@@ -21740,9 +21740,9 @@
             <a:prstDash val="solid"/>
           </a:ln>
           <a:effectLst>
-            <a:outerShdw sx="100000" sy="100000" kx="0" ky="0" algn="bl" rotWithShape="0" blurRad="1.2922856057823127e+288" dist="3.6922445879494656e+287" dir="Infinity">
+            <a:outerShdw sx="100000" sy="100000" kx="0" ky="0" algn="bl" rotWithShape="0" blurRad="88900" dist="25400" dir="5400000">
               <a:srgbClr val="9AB4CC">
-                <a:alpha val="Infinity"/>
+                <a:alpha val="30000"/>
               </a:srgbClr>
             </a:outerShdw>
           </a:effectLst>
@@ -21872,9 +21872,9 @@
             <a:prstDash val="solid"/>
           </a:ln>
           <a:effectLst>
-            <a:outerShdw sx="100000" sy="100000" kx="0" ky="0" algn="bl" rotWithShape="0" blurRad="1.6412027193435371e+292" dist="4.6891506266958215e+291" dir="Infinity">
+            <a:outerShdw sx="100000" sy="100000" kx="0" ky="0" algn="bl" rotWithShape="0" blurRad="88900" dist="25400" dir="5400000">
               <a:srgbClr val="9AB4CC">
-                <a:alpha val="Infinity"/>
+                <a:alpha val="30000"/>
               </a:srgbClr>
             </a:outerShdw>
           </a:effectLst>
@@ -22004,9 +22004,9 @@
             <a:prstDash val="solid"/>
           </a:ln>
           <a:effectLst>
-            <a:outerShdw sx="100000" sy="100000" kx="0" ky="0" algn="bl" rotWithShape="0" blurRad="2.0843274535662923e+296" dist="5.955221295903693e+295" dir="Infinity">
+            <a:outerShdw sx="100000" sy="100000" kx="0" ky="0" algn="bl" rotWithShape="0" blurRad="88900" dist="25400" dir="5400000">
               <a:srgbClr val="9AB4CC">
-                <a:alpha val="Infinity"/>
+                <a:alpha val="30000"/>
               </a:srgbClr>
             </a:outerShdw>
           </a:effectLst>
@@ -22136,9 +22136,9 @@
             <a:prstDash val="solid"/>
           </a:ln>
           <a:effectLst>
-            <a:outerShdw sx="100000" sy="100000" kx="0" ky="0" algn="bl" rotWithShape="0" blurRad="2.647095866029191e+300" dist="7.56313104579769e+299" dir="Infinity">
+            <a:outerShdw sx="100000" sy="100000" kx="0" ky="0" algn="bl" rotWithShape="0" blurRad="88900" dist="25400" dir="5400000">
               <a:srgbClr val="9AB4CC">
-                <a:alpha val="Infinity"/>
+                <a:alpha val="30000"/>
               </a:srgbClr>
             </a:outerShdw>
           </a:effectLst>
@@ -22268,9 +22268,9 @@
             <a:prstDash val="solid"/>
           </a:ln>
           <a:effectLst>
-            <a:outerShdw sx="100000" sy="100000" kx="0" ky="0" algn="bl" rotWithShape="0" blurRad="3.3618117498570727e+304" dist="9.605176428163068e+303" dir="Infinity">
+            <a:outerShdw sx="100000" sy="100000" kx="0" ky="0" algn="bl" rotWithShape="0" blurRad="88900" dist="25400" dir="5400000">
               <a:srgbClr val="9AB4CC">
-                <a:alpha val="Infinity"/>
+                <a:alpha val="30000"/>
               </a:srgbClr>
             </a:outerShdw>
           </a:effectLst>
@@ -22400,9 +22400,9 @@
             <a:prstDash val="solid"/>
           </a:ln>
           <a:effectLst>
-            <a:outerShdw sx="100000" sy="100000" kx="0" ky="0" algn="bl" rotWithShape="0" blurRad="Infinity" dist="1.2198574063767096e+308" dir="Infinity">
+            <a:outerShdw sx="100000" sy="100000" kx="0" ky="0" algn="bl" rotWithShape="0" blurRad="88900" dist="25400" dir="5400000">
               <a:srgbClr val="9AB4CC">
-                <a:alpha val="Infinity"/>
+                <a:alpha val="30000"/>
               </a:srgbClr>
             </a:outerShdw>
           </a:effectLst>
@@ -22532,9 +22532,9 @@
             <a:prstDash val="solid"/>
           </a:ln>
           <a:effectLst>
-            <a:outerShdw sx="100000" sy="100000" kx="0" ky="0" algn="bl" rotWithShape="0" blurRad="Infinity" dist="Infinity" dir="Infinity">
+            <a:outerShdw sx="100000" sy="100000" kx="0" ky="0" algn="bl" rotWithShape="0" blurRad="88900" dist="25400" dir="5400000">
               <a:srgbClr val="9AB4CC">
-                <a:alpha val="Infinity"/>
+                <a:alpha val="30000"/>
               </a:srgbClr>
             </a:outerShdw>
           </a:effectLst>
@@ -22664,9 +22664,9 @@
             <a:prstDash val="solid"/>
           </a:ln>
           <a:effectLst>
-            <a:outerShdw sx="100000" sy="100000" kx="0" ky="0" algn="bl" rotWithShape="0" blurRad="Infinity" dist="Infinity" dir="Infinity">
+            <a:outerShdw sx="100000" sy="100000" kx="0" ky="0" algn="bl" rotWithShape="0" blurRad="88900" dist="25400" dir="5400000">
               <a:srgbClr val="9AB4CC">
-                <a:alpha val="Infinity"/>
+                <a:alpha val="30000"/>
               </a:srgbClr>
             </a:outerShdw>
           </a:effectLst>
@@ -22796,9 +22796,9 @@
             <a:prstDash val="solid"/>
           </a:ln>
           <a:effectLst>
-            <a:outerShdw sx="100000" sy="100000" kx="0" ky="0" algn="bl" rotWithShape="0" blurRad="Infinity" dist="Infinity" dir="Infinity">
+            <a:outerShdw sx="100000" sy="100000" kx="0" ky="0" algn="bl" rotWithShape="0" blurRad="88900" dist="25400" dir="5400000">
               <a:srgbClr val="9AB4CC">
-                <a:alpha val="Infinity"/>
+                <a:alpha val="30000"/>
               </a:srgbClr>
             </a:outerShdw>
           </a:effectLst>
@@ -23136,9 +23136,9 @@
             <a:prstDash val="solid"/>
           </a:ln>
           <a:effectLst>
-            <a:outerShdw sx="100000" sy="100000" kx="0" ky="0" algn="bl" rotWithShape="0" blurRad="Infinity" dist="Infinity" dir="Infinity">
+            <a:outerShdw sx="100000" sy="100000" kx="0" ky="0" algn="bl" rotWithShape="0" blurRad="88900" dist="25400" dir="5400000">
               <a:srgbClr val="9AB4CC">
-                <a:alpha val="Infinity"/>
+                <a:alpha val="30000"/>
               </a:srgbClr>
             </a:outerShdw>
           </a:effectLst>
@@ -23298,9 +23298,9 @@
             <a:prstDash val="solid"/>
           </a:ln>
           <a:effectLst>
-            <a:outerShdw sx="100000" sy="100000" kx="0" ky="0" algn="bl" rotWithShape="0" blurRad="Infinity" dist="Infinity" dir="Infinity">
+            <a:outerShdw sx="100000" sy="100000" kx="0" ky="0" algn="bl" rotWithShape="0" blurRad="88900" dist="25400" dir="5400000">
               <a:srgbClr val="9AB4CC">
-                <a:alpha val="Infinity"/>
+                <a:alpha val="30000"/>
               </a:srgbClr>
             </a:outerShdw>
           </a:effectLst>
@@ -23440,9 +23440,9 @@
             <a:prstDash val="solid"/>
           </a:ln>
           <a:effectLst>
-            <a:outerShdw sx="100000" sy="100000" kx="0" ky="0" algn="bl" rotWithShape="0" blurRad="Infinity" dist="Infinity" dir="Infinity">
+            <a:outerShdw sx="100000" sy="100000" kx="0" ky="0" algn="bl" rotWithShape="0" blurRad="88900" dist="25400" dir="5400000">
               <a:srgbClr val="9AB4CC">
-                <a:alpha val="Infinity"/>
+                <a:alpha val="30000"/>
               </a:srgbClr>
             </a:outerShdw>
           </a:effectLst>
@@ -24324,9 +24324,9 @@
             <a:prstDash val="solid"/>
           </a:ln>
           <a:effectLst>
-            <a:outerShdw sx="100000" sy="100000" kx="0" ky="0" algn="bl" rotWithShape="0" blurRad="6.016328324026578e+37" dist="1.7189509497218795e+37" dir="9.069926400000001e+44">
+            <a:outerShdw sx="100000" sy="100000" kx="0" ky="0" algn="bl" rotWithShape="0" blurRad="88900" dist="25400" dir="5400000">
               <a:srgbClr val="9AB4CC">
-                <a:alpha val="3e+44"/>
+                <a:alpha val="30000"/>
               </a:srgbClr>
             </a:outerShdw>
           </a:effectLst>
@@ -24466,9 +24466,9 @@
             <a:prstDash val="solid"/>
           </a:ln>
           <a:effectLst>
-            <a:outerShdw sx="100000" sy="100000" kx="0" ky="0" algn="bl" rotWithShape="0" blurRad="7.640736971513755e+41" dist="2.183067706146787e+41" dir="5.44195584e+49">
+            <a:outerShdw sx="100000" sy="100000" kx="0" ky="0" algn="bl" rotWithShape="0" blurRad="88900" dist="25400" dir="5400000">
               <a:srgbClr val="9AB4CC">
-                <a:alpha val="2.9999999999999997e+49"/>
+                <a:alpha val="30000"/>
               </a:srgbClr>
             </a:outerShdw>
           </a:effectLst>
@@ -24608,9 +24608,9 @@
             <a:prstDash val="solid"/>
           </a:ln>
           <a:effectLst>
-            <a:outerShdw sx="100000" sy="100000" kx="0" ky="0" algn="bl" rotWithShape="0" blurRad="9.703735953822469e+45" dist="2.7724959868064195e+45" dir="3.2651735040000005e+54">
+            <a:outerShdw sx="100000" sy="100000" kx="0" ky="0" algn="bl" rotWithShape="0" blurRad="88900" dist="25400" dir="5400000">
               <a:srgbClr val="9AB4CC">
-                <a:alpha val="2.9999999999999996e+54"/>
+                <a:alpha val="30000"/>
               </a:srgbClr>
             </a:outerShdw>
           </a:effectLst>
@@ -24750,9 +24750,9 @@
             <a:prstDash val="solid"/>
           </a:ln>
           <a:effectLst>
-            <a:outerShdw sx="100000" sy="100000" kx="0" ky="0" algn="bl" rotWithShape="0" blurRad="1.2323744661354536e+50" dist="3.5210699032441527e+49" dir="1.9591041024000004e+59">
+            <a:outerShdw sx="100000" sy="100000" kx="0" ky="0" algn="bl" rotWithShape="0" blurRad="88900" dist="25400" dir="5400000">
               <a:srgbClr val="9AB4CC">
-                <a:alpha val="2.9999999999999996e+59"/>
+                <a:alpha val="30000"/>
               </a:srgbClr>
             </a:outerShdw>
           </a:effectLst>
@@ -25230,9 +25230,9 @@
             <a:prstDash val="solid"/>
           </a:ln>
           <a:effectLst>
-            <a:outerShdw sx="100000" sy="100000" kx="0" ky="0" algn="bl" rotWithShape="0" blurRad="Infinity" dist="Infinity" dir="Infinity">
+            <a:outerShdw sx="100000" sy="100000" kx="0" ky="0" algn="bl" rotWithShape="0" blurRad="88900" dist="25400" dir="5400000">
               <a:srgbClr val="9AB4CC">
-                <a:alpha val="Infinity"/>
+                <a:alpha val="30000"/>
               </a:srgbClr>
             </a:outerShdw>
           </a:effectLst>
@@ -25372,9 +25372,9 @@
             <a:prstDash val="solid"/>
           </a:ln>
           <a:effectLst>
-            <a:outerShdw sx="100000" sy="100000" kx="0" ky="0" algn="bl" rotWithShape="0" blurRad="Infinity" dist="Infinity" dir="Infinity">
+            <a:outerShdw sx="100000" sy="100000" kx="0" ky="0" algn="bl" rotWithShape="0" blurRad="88900" dist="25400" dir="5400000">
               <a:srgbClr val="9AB4CC">
-                <a:alpha val="Infinity"/>
+                <a:alpha val="30000"/>
               </a:srgbClr>
             </a:outerShdw>
           </a:effectLst>
@@ -25514,9 +25514,9 @@
             <a:prstDash val="solid"/>
           </a:ln>
           <a:effectLst>
-            <a:outerShdw sx="100000" sy="100000" kx="0" ky="0" algn="bl" rotWithShape="0" blurRad="Infinity" dist="Infinity" dir="Infinity">
+            <a:outerShdw sx="100000" sy="100000" kx="0" ky="0" algn="bl" rotWithShape="0" blurRad="88900" dist="25400" dir="5400000">
               <a:srgbClr val="9AB4CC">
-                <a:alpha val="Infinity"/>
+                <a:alpha val="30000"/>
               </a:srgbClr>
             </a:outerShdw>
           </a:effectLst>
@@ -25656,9 +25656,9 @@
             <a:prstDash val="solid"/>
           </a:ln>
           <a:effectLst>
-            <a:outerShdw sx="100000" sy="100000" kx="0" ky="0" algn="bl" rotWithShape="0" blurRad="Infinity" dist="Infinity" dir="Infinity">
+            <a:outerShdw sx="100000" sy="100000" kx="0" ky="0" algn="bl" rotWithShape="0" blurRad="88900" dist="25400" dir="5400000">
               <a:srgbClr val="9AB4CC">
-                <a:alpha val="Infinity"/>
+                <a:alpha val="30000"/>
               </a:srgbClr>
             </a:outerShdw>
           </a:effectLst>
@@ -25798,9 +25798,9 @@
             <a:prstDash val="solid"/>
           </a:ln>
           <a:effectLst>
-            <a:outerShdw sx="100000" sy="100000" kx="0" ky="0" algn="bl" rotWithShape="0" blurRad="Infinity" dist="Infinity" dir="Infinity">
+            <a:outerShdw sx="100000" sy="100000" kx="0" ky="0" algn="bl" rotWithShape="0" blurRad="88900" dist="25400" dir="5400000">
               <a:srgbClr val="9AB4CC">
-                <a:alpha val="Infinity"/>
+                <a:alpha val="30000"/>
               </a:srgbClr>
             </a:outerShdw>
           </a:effectLst>
@@ -25940,9 +25940,9 @@
             <a:prstDash val="solid"/>
           </a:ln>
           <a:effectLst>
-            <a:outerShdw sx="100000" sy="100000" kx="0" ky="0" algn="bl" rotWithShape="0" blurRad="Infinity" dist="Infinity" dir="Infinity">
+            <a:outerShdw sx="100000" sy="100000" kx="0" ky="0" algn="bl" rotWithShape="0" blurRad="88900" dist="25400" dir="5400000">
               <a:srgbClr val="9AB4CC">
-                <a:alpha val="Infinity"/>
+                <a:alpha val="30000"/>
               </a:srgbClr>
             </a:outerShdw>
           </a:effectLst>
@@ -27924,9 +27924,9 @@
             <a:prstDash val="solid"/>
           </a:ln>
           <a:effectLst>
-            <a:outerShdw sx="100000" sy="100000" kx="0" ky="0" algn="bl" rotWithShape="0" blurRad="Infinity" dist="Infinity" dir="Infinity">
+            <a:outerShdw sx="100000" sy="100000" kx="0" ky="0" algn="bl" rotWithShape="0" blurRad="88900" dist="25400" dir="5400000">
               <a:srgbClr val="9AB4CC">
-                <a:alpha val="Infinity"/>
+                <a:alpha val="30000"/>
               </a:srgbClr>
             </a:outerShdw>
           </a:effectLst>
@@ -28086,9 +28086,9 @@
             <a:prstDash val="solid"/>
           </a:ln>
           <a:effectLst>
-            <a:outerShdw sx="100000" sy="100000" kx="0" ky="0" algn="bl" rotWithShape="0" blurRad="Infinity" dist="Infinity" dir="Infinity">
+            <a:outerShdw sx="100000" sy="100000" kx="0" ky="0" algn="bl" rotWithShape="0" blurRad="88900" dist="25400" dir="5400000">
               <a:srgbClr val="9AB4CC">
-                <a:alpha val="Infinity"/>
+                <a:alpha val="30000"/>
               </a:srgbClr>
             </a:outerShdw>
           </a:effectLst>
@@ -28233,9 +28233,9 @@
             <a:prstDash val="solid"/>
           </a:ln>
           <a:effectLst>
-            <a:outerShdw sx="100000" sy="100000" kx="0" ky="0" algn="bl" rotWithShape="0" blurRad="Infinity" dist="Infinity" dir="Infinity">
+            <a:outerShdw sx="100000" sy="100000" kx="0" ky="0" algn="bl" rotWithShape="0" blurRad="88900" dist="25400" dir="5400000">
               <a:srgbClr val="9AB4CC">
-                <a:alpha val="Infinity"/>
+                <a:alpha val="30000"/>
               </a:srgbClr>
             </a:outerShdw>
           </a:effectLst>
@@ -28380,9 +28380,9 @@
             <a:prstDash val="solid"/>
           </a:ln>
           <a:effectLst>
-            <a:outerShdw sx="100000" sy="100000" kx="0" ky="0" algn="bl" rotWithShape="0" blurRad="Infinity" dist="Infinity" dir="Infinity">
+            <a:outerShdw sx="100000" sy="100000" kx="0" ky="0" algn="bl" rotWithShape="0" blurRad="88900" dist="25400" dir="5400000">
               <a:srgbClr val="9AB4CC">
-                <a:alpha val="Infinity"/>
+                <a:alpha val="30000"/>
               </a:srgbClr>
             </a:outerShdw>
           </a:effectLst>
@@ -28735,9 +28735,9 @@
             <a:prstDash val="solid"/>
           </a:ln>
           <a:effectLst>
-            <a:outerShdw sx="100000" sy="100000" kx="0" ky="0" algn="bl" rotWithShape="0" blurRad="Infinity" dist="Infinity" dir="Infinity">
+            <a:outerShdw sx="100000" sy="100000" kx="0" ky="0" algn="bl" rotWithShape="0" blurRad="88900" dist="25400" dir="5400000">
               <a:srgbClr val="9AB4CC">
-                <a:alpha val="Infinity"/>
+                <a:alpha val="30000"/>
               </a:srgbClr>
             </a:outerShdw>
           </a:effectLst>
@@ -28867,9 +28867,9 @@
             <a:prstDash val="solid"/>
           </a:ln>
           <a:effectLst>
-            <a:outerShdw sx="100000" sy="100000" kx="0" ky="0" algn="bl" rotWithShape="0" blurRad="Infinity" dist="Infinity" dir="Infinity">
+            <a:outerShdw sx="100000" sy="100000" kx="0" ky="0" algn="bl" rotWithShape="0" blurRad="88900" dist="25400" dir="5400000">
               <a:srgbClr val="9AB4CC">
-                <a:alpha val="Infinity"/>
+                <a:alpha val="30000"/>
               </a:srgbClr>
             </a:outerShdw>
           </a:effectLst>
@@ -28999,9 +28999,9 @@
             <a:prstDash val="solid"/>
           </a:ln>
           <a:effectLst>
-            <a:outerShdw sx="100000" sy="100000" kx="0" ky="0" algn="bl" rotWithShape="0" blurRad="Infinity" dist="Infinity" dir="Infinity">
+            <a:outerShdw sx="100000" sy="100000" kx="0" ky="0" algn="bl" rotWithShape="0" blurRad="88900" dist="25400" dir="5400000">
               <a:srgbClr val="9AB4CC">
-                <a:alpha val="Infinity"/>
+                <a:alpha val="30000"/>
               </a:srgbClr>
             </a:outerShdw>
           </a:effectLst>
@@ -29131,9 +29131,9 @@
             <a:prstDash val="solid"/>
           </a:ln>
           <a:effectLst>
-            <a:outerShdw sx="100000" sy="100000" kx="0" ky="0" algn="bl" rotWithShape="0" blurRad="Infinity" dist="Infinity" dir="Infinity">
+            <a:outerShdw sx="100000" sy="100000" kx="0" ky="0" algn="bl" rotWithShape="0" blurRad="88900" dist="25400" dir="5400000">
               <a:srgbClr val="9AB4CC">
-                <a:alpha val="Infinity"/>
+                <a:alpha val="30000"/>
               </a:srgbClr>
             </a:outerShdw>
           </a:effectLst>
@@ -29263,9 +29263,9 @@
             <a:prstDash val="solid"/>
           </a:ln>
           <a:effectLst>
-            <a:outerShdw sx="100000" sy="100000" kx="0" ky="0" algn="bl" rotWithShape="0" blurRad="Infinity" dist="Infinity" dir="Infinity">
+            <a:outerShdw sx="100000" sy="100000" kx="0" ky="0" algn="bl" rotWithShape="0" blurRad="88900" dist="25400" dir="5400000">
               <a:srgbClr val="9AB4CC">
-                <a:alpha val="Infinity"/>
+                <a:alpha val="30000"/>
               </a:srgbClr>
             </a:outerShdw>
           </a:effectLst>
@@ -29713,9 +29713,9 @@
             <a:prstDash val="solid"/>
           </a:ln>
           <a:effectLst>
-            <a:outerShdw sx="100000" sy="100000" kx="0" ky="0" algn="bl" rotWithShape="0" blurRad="Infinity" dist="Infinity" dir="Infinity">
+            <a:outerShdw sx="100000" sy="100000" kx="0" ky="0" algn="bl" rotWithShape="0" blurRad="88900" dist="25400" dir="5400000">
               <a:srgbClr val="9AB4CC">
-                <a:alpha val="Infinity"/>
+                <a:alpha val="30000"/>
               </a:srgbClr>
             </a:outerShdw>
           </a:effectLst>
@@ -29800,9 +29800,9 @@
             <a:prstDash val="solid"/>
           </a:ln>
           <a:effectLst>
-            <a:outerShdw sx="100000" sy="100000" kx="0" ky="0" algn="bl" rotWithShape="0" blurRad="Infinity" dist="Infinity" dir="Infinity">
+            <a:outerShdw sx="100000" sy="100000" kx="0" ky="0" algn="bl" rotWithShape="0" blurRad="88900" dist="25400" dir="5400000">
               <a:srgbClr val="9AB4CC">
-                <a:alpha val="Infinity"/>
+                <a:alpha val="30000"/>
               </a:srgbClr>
             </a:outerShdw>
           </a:effectLst>
@@ -29887,9 +29887,9 @@
             <a:prstDash val="solid"/>
           </a:ln>
           <a:effectLst>
-            <a:outerShdw sx="100000" sy="100000" kx="0" ky="0" algn="bl" rotWithShape="0" blurRad="Infinity" dist="Infinity" dir="Infinity">
+            <a:outerShdw sx="100000" sy="100000" kx="0" ky="0" algn="bl" rotWithShape="0" blurRad="88900" dist="25400" dir="5400000">
               <a:srgbClr val="9AB4CC">
-                <a:alpha val="Infinity"/>
+                <a:alpha val="30000"/>
               </a:srgbClr>
             </a:outerShdw>
           </a:effectLst>
@@ -29974,9 +29974,9 @@
             <a:prstDash val="solid"/>
           </a:ln>
           <a:effectLst>
-            <a:outerShdw sx="100000" sy="100000" kx="0" ky="0" algn="bl" rotWithShape="0" blurRad="Infinity" dist="Infinity" dir="Infinity">
+            <a:outerShdw sx="100000" sy="100000" kx="0" ky="0" algn="bl" rotWithShape="0" blurRad="88900" dist="25400" dir="5400000">
               <a:srgbClr val="9AB4CC">
-                <a:alpha val="Infinity"/>
+                <a:alpha val="30000"/>
               </a:srgbClr>
             </a:outerShdw>
           </a:effectLst>
@@ -30061,9 +30061,9 @@
             <a:prstDash val="solid"/>
           </a:ln>
           <a:effectLst>
-            <a:outerShdw sx="100000" sy="100000" kx="0" ky="0" algn="bl" rotWithShape="0" blurRad="Infinity" dist="Infinity" dir="Infinity">
+            <a:outerShdw sx="100000" sy="100000" kx="0" ky="0" algn="bl" rotWithShape="0" blurRad="88900" dist="25400" dir="5400000">
               <a:srgbClr val="9AB4CC">
-                <a:alpha val="Infinity"/>
+                <a:alpha val="30000"/>
               </a:srgbClr>
             </a:outerShdw>
           </a:effectLst>
@@ -30715,9 +30715,9 @@
             <a:prstDash val="solid"/>
           </a:ln>
           <a:effectLst>
-            <a:outerShdw sx="100000" sy="100000" kx="0" ky="0" algn="bl" rotWithShape="0" blurRad="1.5651155719920262e+54" dist="4.471758777120074e+53" dir="1.1754624614400003e+64">
+            <a:outerShdw sx="100000" sy="100000" kx="0" ky="0" algn="bl" rotWithShape="0" blurRad="88900" dist="25400" dir="5400000">
               <a:srgbClr val="9AB4CC">
-                <a:alpha val="2.9999999999999996e+64"/>
+                <a:alpha val="30000"/>
               </a:srgbClr>
             </a:outerShdw>
           </a:effectLst>
@@ -30847,9 +30847,9 @@
             <a:prstDash val="solid"/>
           </a:ln>
           <a:effectLst>
-            <a:outerShdw sx="100000" sy="100000" kx="0" ky="0" algn="bl" rotWithShape="0" blurRad="1.9876967764298733e+58" dist="5.679133646942494e+57" dir="7.052774768640002e+68">
+            <a:outerShdw sx="100000" sy="100000" kx="0" ky="0" algn="bl" rotWithShape="0" blurRad="88900" dist="25400" dir="5400000">
               <a:srgbClr val="9AB4CC">
-                <a:alpha val="2.9999999999999995e+69"/>
+                <a:alpha val="30000"/>
               </a:srgbClr>
             </a:outerShdw>
           </a:effectLst>
@@ -30979,9 +30979,9 @@
             <a:prstDash val="solid"/>
           </a:ln>
           <a:effectLst>
-            <a:outerShdw sx="100000" sy="100000" kx="0" ky="0" algn="bl" rotWithShape="0" blurRad="2.524374906065939e+62" dist="7.212499731616968e+61" dir="4.2316648611840007e+73">
+            <a:outerShdw sx="100000" sy="100000" kx="0" ky="0" algn="bl" rotWithShape="0" blurRad="88900" dist="25400" dir="5400000">
               <a:srgbClr val="9AB4CC">
-                <a:alpha val="2.9999999999999995e+74"/>
+                <a:alpha val="30000"/>
               </a:srgbClr>
             </a:outerShdw>
           </a:effectLst>
@@ -31111,9 +31111,9 @@
             <a:prstDash val="solid"/>
           </a:ln>
           <a:effectLst>
-            <a:outerShdw sx="100000" sy="100000" kx="0" ky="0" algn="bl" rotWithShape="0" blurRad="3.2059561307037426e+66" dist="9.15987465915355e+65" dir="2.5389989167104004e+78">
+            <a:outerShdw sx="100000" sy="100000" kx="0" ky="0" algn="bl" rotWithShape="0" blurRad="88900" dist="25400" dir="5400000">
               <a:srgbClr val="9AB4CC">
-                <a:alpha val="3e+79"/>
+                <a:alpha val="30000"/>
               </a:srgbClr>
             </a:outerShdw>
           </a:effectLst>
@@ -31243,9 +31243,9 @@
             <a:prstDash val="solid"/>
           </a:ln>
           <a:effectLst>
-            <a:outerShdw sx="100000" sy="100000" kx="0" ky="0" algn="bl" rotWithShape="0" blurRad="4.071564285993753e+70" dist="1.1633040817125008e+70" dir="1.5233993500262402e+83">
+            <a:outerShdw sx="100000" sy="100000" kx="0" ky="0" algn="bl" rotWithShape="0" blurRad="88900" dist="25400" dir="5400000">
               <a:srgbClr val="9AB4CC">
-                <a:alpha val="2.9999999999999995e+84"/>
+                <a:alpha val="30000"/>
               </a:srgbClr>
             </a:outerShdw>
           </a:effectLst>
@@ -31375,9 +31375,9 @@
             <a:prstDash val="solid"/>
           </a:ln>
           <a:effectLst>
-            <a:outerShdw sx="100000" sy="100000" kx="0" ky="0" algn="bl" rotWithShape="0" blurRad="5.170886643212067e+74" dist="1.477396183774876e+74" dir="9.14039610015744e+87">
+            <a:outerShdw sx="100000" sy="100000" kx="0" ky="0" algn="bl" rotWithShape="0" blurRad="88900" dist="25400" dir="5400000">
               <a:srgbClr val="9AB4CC">
-                <a:alpha val="2.9999999999999996e+89"/>
+                <a:alpha val="30000"/>
               </a:srgbClr>
             </a:outerShdw>
           </a:effectLst>
@@ -31507,9 +31507,9 @@
             <a:prstDash val="solid"/>
           </a:ln>
           <a:effectLst>
-            <a:outerShdw sx="100000" sy="100000" kx="0" ky="0" algn="bl" rotWithShape="0" blurRad="6.567026036879325e+78" dist="1.8762931533940924e+78" dir="5.484237660094465e+92">
+            <a:outerShdw sx="100000" sy="100000" kx="0" ky="0" algn="bl" rotWithShape="0" blurRad="88900" dist="25400" dir="5400000">
               <a:srgbClr val="9AB4CC">
-                <a:alpha val="2.9999999999999997e+94"/>
+                <a:alpha val="30000"/>
               </a:srgbClr>
             </a:outerShdw>
           </a:effectLst>
@@ -31639,9 +31639,9 @@
             <a:prstDash val="solid"/>
           </a:ln>
           <a:effectLst>
-            <a:outerShdw sx="100000" sy="100000" kx="0" ky="0" algn="bl" rotWithShape="0" blurRad="8.340123066836742e+82" dist="2.3828923048104974e+82" dir="3.2905425960566786e+97">
+            <a:outerShdw sx="100000" sy="100000" kx="0" ky="0" algn="bl" rotWithShape="0" blurRad="88900" dist="25400" dir="5400000">
               <a:srgbClr val="9AB4CC">
-                <a:alpha val="2.9999999999999997e+99"/>
+                <a:alpha val="30000"/>
               </a:srgbClr>
             </a:outerShdw>
           </a:effectLst>
@@ -31771,9 +31771,9 @@
             <a:prstDash val="solid"/>
           </a:ln>
           <a:effectLst>
-            <a:outerShdw sx="100000" sy="100000" kx="0" ky="0" algn="bl" rotWithShape="0" blurRad="1.0591956294882662e+87" dist="3.0262732271093317e+86" dir="1.9743255576340073e+102">
+            <a:outerShdw sx="100000" sy="100000" kx="0" ky="0" algn="bl" rotWithShape="0" blurRad="88900" dist="25400" dir="5400000">
               <a:srgbClr val="9AB4CC">
-                <a:alpha val="3e+104"/>
+                <a:alpha val="30000"/>
               </a:srgbClr>
             </a:outerShdw>
           </a:effectLst>
@@ -31942,9 +31942,9 @@
             <a:prstDash val="solid"/>
           </a:ln>
           <a:effectLst>
-            <a:outerShdw sx="100000" sy="100000" kx="0" ky="0" algn="bl" rotWithShape="0" blurRad="1.3451784494500981e+91" dist="3.8433669984288512e+90" dir="1.1845953345804043e+107">
+            <a:outerShdw sx="100000" sy="100000" kx="0" ky="0" algn="bl" rotWithShape="0" blurRad="88900" dist="25400" dir="5400000">
               <a:srgbClr val="9AB4CC">
-                <a:alpha val="2.9999999999999997e+109"/>
+                <a:alpha val="30000"/>
               </a:srgbClr>
             </a:outerShdw>
           </a:effectLst>
@@ -32074,9 +32074,9 @@
             <a:prstDash val="solid"/>
           </a:ln>
           <a:effectLst>
-            <a:outerShdw sx="100000" sy="100000" kx="0" ky="0" algn="bl" rotWithShape="0" blurRad="1.7083766308016246e+95" dist="4.8810760880046414e+94" dir="7.107572007482426e+111">
+            <a:outerShdw sx="100000" sy="100000" kx="0" ky="0" algn="bl" rotWithShape="0" blurRad="88900" dist="25400" dir="5400000">
               <a:srgbClr val="9AB4CC">
-                <a:alpha val="2.9999999999999995e+114"/>
+                <a:alpha val="30000"/>
               </a:srgbClr>
             </a:outerShdw>
           </a:effectLst>
@@ -33417,9 +33417,9 @@
             <a:prstDash val="solid"/>
           </a:ln>
           <a:effectLst>
-            <a:outerShdw sx="100000" sy="100000" kx="0" ky="0" algn="bl" rotWithShape="0" blurRad="2.1696383211180632e+99" dist="6.198966631765894e+98" dir="4.2645432044894554e+116">
+            <a:outerShdw sx="100000" sy="100000" kx="0" ky="0" algn="bl" rotWithShape="0" blurRad="88900" dist="25400" dir="5400000">
               <a:srgbClr val="9AB4CC">
-                <a:alpha val="2.9999999999999997e+119"/>
+                <a:alpha val="30000"/>
               </a:srgbClr>
             </a:outerShdw>
           </a:effectLst>
@@ -33579,9 +33579,9 @@
             <a:prstDash val="solid"/>
           </a:ln>
           <a:effectLst>
-            <a:outerShdw sx="100000" sy="100000" kx="0" ky="0" algn="bl" rotWithShape="0" blurRad="2.7554406678199403e+103" dist="7.872687622342685e+102" dir="2.5587259226936733e+121">
+            <a:outerShdw sx="100000" sy="100000" kx="0" ky="0" algn="bl" rotWithShape="0" blurRad="88900" dist="25400" dir="5400000">
               <a:srgbClr val="9AB4CC">
-                <a:alpha val="2.9999999999999995e+124"/>
+                <a:alpha val="30000"/>
               </a:srgbClr>
             </a:outerShdw>
           </a:effectLst>
@@ -33721,9 +33721,9 @@
             <a:prstDash val="solid"/>
           </a:ln>
           <a:effectLst>
-            <a:outerShdw sx="100000" sy="100000" kx="0" ky="0" algn="bl" rotWithShape="0" blurRad="3.499409648131324e+107" dist="9.998313280375211e+106" dir="1.535235553616204e+126">
+            <a:outerShdw sx="100000" sy="100000" kx="0" ky="0" algn="bl" rotWithShape="0" blurRad="88900" dist="25400" dir="5400000">
               <a:srgbClr val="9AB4CC">
-                <a:alpha val="2.9999999999999997e+129"/>
+                <a:alpha val="30000"/>
               </a:srgbClr>
             </a:outerShdw>
           </a:effectLst>
@@ -34328,9 +34328,9 @@
             <a:prstDash val="solid"/>
           </a:ln>
           <a:effectLst>
-            <a:outerShdw sx="100000" sy="100000" kx="0" ky="0" algn="bl" rotWithShape="0" blurRad="4.4442502531267815e+111" dist="1.2697857866076517e+111" dir="9.211413321697224e+130">
+            <a:outerShdw sx="100000" sy="100000" kx="0" ky="0" algn="bl" rotWithShape="0" blurRad="88900" dist="25400" dir="5400000">
               <a:srgbClr val="9AB4CC">
-                <a:alpha val="2.9999999999999996e+134"/>
+                <a:alpha val="30000"/>
               </a:srgbClr>
             </a:outerShdw>
           </a:effectLst>
@@ -34470,9 +34470,9 @@
             <a:prstDash val="solid"/>
           </a:ln>
           <a:effectLst>
-            <a:outerShdw sx="100000" sy="100000" kx="0" ky="0" algn="bl" rotWithShape="0" blurRad="5.644197821471012e+115" dist="1.6126279489917177e+115" dir="5.526847993018334e+135">
+            <a:outerShdw sx="100000" sy="100000" kx="0" ky="0" algn="bl" rotWithShape="0" blurRad="88900" dist="25400" dir="5400000">
               <a:srgbClr val="9AB4CC">
-                <a:alpha val="2.9999999999999994e+139"/>
+                <a:alpha val="30000"/>
               </a:srgbClr>
             </a:outerShdw>
           </a:effectLst>
@@ -34612,9 +34612,9 @@
             <a:prstDash val="solid"/>
           </a:ln>
           <a:effectLst>
-            <a:outerShdw sx="100000" sy="100000" kx="0" ky="0" algn="bl" rotWithShape="0" blurRad="7.168131233268186e+119" dist="2.0480374952194813e+119" dir="3.3161087958110005e+140">
+            <a:outerShdw sx="100000" sy="100000" kx="0" ky="0" algn="bl" rotWithShape="0" blurRad="88900" dist="25400" dir="5400000">
               <a:srgbClr val="9AB4CC">
-                <a:alpha val="2.9999999999999996e+144"/>
+                <a:alpha val="30000"/>
               </a:srgbClr>
             </a:outerShdw>
           </a:effectLst>
@@ -34754,9 +34754,9 @@
             <a:prstDash val="solid"/>
           </a:ln>
           <a:effectLst>
-            <a:outerShdw sx="100000" sy="100000" kx="0" ky="0" algn="bl" rotWithShape="0" blurRad="9.103526666250596e+123" dist="2.6010076189287412e+123" dir="1.9896652774866004e+145">
+            <a:outerShdw sx="100000" sy="100000" kx="0" ky="0" algn="bl" rotWithShape="0" blurRad="88900" dist="25400" dir="5400000">
               <a:srgbClr val="9AB4CC">
-                <a:alpha val="2.9999999999999996e+149"/>
+                <a:alpha val="30000"/>
               </a:srgbClr>
             </a:outerShdw>
           </a:effectLst>
@@ -35104,9 +35104,9 @@
             <a:prstDash val="solid"/>
           </a:ln>
           <a:effectLst>
-            <a:outerShdw sx="100000" sy="100000" kx="0" ky="0" algn="bl" rotWithShape="0" blurRad="1.1561478866138256e+128" dist="3.303279676039501e+127" dir="1.1937991664919603e+150">
+            <a:outerShdw sx="100000" sy="100000" kx="0" ky="0" algn="bl" rotWithShape="0" blurRad="88900" dist="25400" dir="5400000">
               <a:srgbClr val="9AB4CC">
-                <a:alpha val="2.9999999999999997e+154"/>
+                <a:alpha val="30000"/>
               </a:srgbClr>
             </a:outerShdw>
           </a:effectLst>
@@ -35266,9 +35266,9 @@
             <a:prstDash val="solid"/>
           </a:ln>
           <a:effectLst>
-            <a:outerShdw sx="100000" sy="100000" kx="0" ky="0" algn="bl" rotWithShape="0" blurRad="1.4683078159995586e+132" dist="4.195165188570166e+131" dir="7.162794998951762e+154">
+            <a:outerShdw sx="100000" sy="100000" kx="0" ky="0" algn="bl" rotWithShape="0" blurRad="88900" dist="25400" dir="5400000">
               <a:srgbClr val="9AB4CC">
-                <a:alpha val="2.9999999999999998e+159"/>
+                <a:alpha val="30000"/>
               </a:srgbClr>
             </a:outerShdw>
           </a:effectLst>
@@ -35408,9 +35408,9 @@
             <a:prstDash val="solid"/>
           </a:ln>
           <a:effectLst>
-            <a:outerShdw sx="100000" sy="100000" kx="0" ky="0" algn="bl" rotWithShape="0" blurRad="1.8647509263194394e+136" dist="5.327859789484111e+135" dir="4.297676999371057e+159">
+            <a:outerShdw sx="100000" sy="100000" kx="0" ky="0" algn="bl" rotWithShape="0" blurRad="88900" dist="25400" dir="5400000">
               <a:srgbClr val="9AB4CC">
-                <a:alpha val="3e+164"/>
+                <a:alpha val="30000"/>
               </a:srgbClr>
             </a:outerShdw>
           </a:effectLst>
